--- a/Proto/Layout/layout.pptx
+++ b/Proto/Layout/layout.pptx
@@ -262,7 +262,7 @@
           <a:p>
             <a:fld id="{9FF286C0-AED3-4EB2-81B2-2C6EA95602B7}" type="datetimeFigureOut">
               <a:rPr lang="ko-KR" altLang="en-US" smtClean="0"/>
-              <a:t>2026-05-18</a:t>
+              <a:t>2026-05-27</a:t>
             </a:fld>
             <a:endParaRPr lang="ko-KR" altLang="en-US"/>
           </a:p>
@@ -460,7 +460,7 @@
           <a:p>
             <a:fld id="{9FF286C0-AED3-4EB2-81B2-2C6EA95602B7}" type="datetimeFigureOut">
               <a:rPr lang="ko-KR" altLang="en-US" smtClean="0"/>
-              <a:t>2026-05-18</a:t>
+              <a:t>2026-05-27</a:t>
             </a:fld>
             <a:endParaRPr lang="ko-KR" altLang="en-US"/>
           </a:p>
@@ -668,7 +668,7 @@
           <a:p>
             <a:fld id="{9FF286C0-AED3-4EB2-81B2-2C6EA95602B7}" type="datetimeFigureOut">
               <a:rPr lang="ko-KR" altLang="en-US" smtClean="0"/>
-              <a:t>2026-05-18</a:t>
+              <a:t>2026-05-27</a:t>
             </a:fld>
             <a:endParaRPr lang="ko-KR" altLang="en-US"/>
           </a:p>
@@ -866,7 +866,7 @@
           <a:p>
             <a:fld id="{9FF286C0-AED3-4EB2-81B2-2C6EA95602B7}" type="datetimeFigureOut">
               <a:rPr lang="ko-KR" altLang="en-US" smtClean="0"/>
-              <a:t>2026-05-18</a:t>
+              <a:t>2026-05-27</a:t>
             </a:fld>
             <a:endParaRPr lang="ko-KR" altLang="en-US"/>
           </a:p>
@@ -1141,7 +1141,7 @@
           <a:p>
             <a:fld id="{9FF286C0-AED3-4EB2-81B2-2C6EA95602B7}" type="datetimeFigureOut">
               <a:rPr lang="ko-KR" altLang="en-US" smtClean="0"/>
-              <a:t>2026-05-18</a:t>
+              <a:t>2026-05-27</a:t>
             </a:fld>
             <a:endParaRPr lang="ko-KR" altLang="en-US"/>
           </a:p>
@@ -1406,7 +1406,7 @@
           <a:p>
             <a:fld id="{9FF286C0-AED3-4EB2-81B2-2C6EA95602B7}" type="datetimeFigureOut">
               <a:rPr lang="ko-KR" altLang="en-US" smtClean="0"/>
-              <a:t>2026-05-18</a:t>
+              <a:t>2026-05-27</a:t>
             </a:fld>
             <a:endParaRPr lang="ko-KR" altLang="en-US"/>
           </a:p>
@@ -1818,7 +1818,7 @@
           <a:p>
             <a:fld id="{9FF286C0-AED3-4EB2-81B2-2C6EA95602B7}" type="datetimeFigureOut">
               <a:rPr lang="ko-KR" altLang="en-US" smtClean="0"/>
-              <a:t>2026-05-18</a:t>
+              <a:t>2026-05-27</a:t>
             </a:fld>
             <a:endParaRPr lang="ko-KR" altLang="en-US"/>
           </a:p>
@@ -1959,7 +1959,7 @@
           <a:p>
             <a:fld id="{9FF286C0-AED3-4EB2-81B2-2C6EA95602B7}" type="datetimeFigureOut">
               <a:rPr lang="ko-KR" altLang="en-US" smtClean="0"/>
-              <a:t>2026-05-18</a:t>
+              <a:t>2026-05-27</a:t>
             </a:fld>
             <a:endParaRPr lang="ko-KR" altLang="en-US"/>
           </a:p>
@@ -2072,7 +2072,7 @@
           <a:p>
             <a:fld id="{9FF286C0-AED3-4EB2-81B2-2C6EA95602B7}" type="datetimeFigureOut">
               <a:rPr lang="ko-KR" altLang="en-US" smtClean="0"/>
-              <a:t>2026-05-18</a:t>
+              <a:t>2026-05-27</a:t>
             </a:fld>
             <a:endParaRPr lang="ko-KR" altLang="en-US"/>
           </a:p>
@@ -2383,7 +2383,7 @@
           <a:p>
             <a:fld id="{9FF286C0-AED3-4EB2-81B2-2C6EA95602B7}" type="datetimeFigureOut">
               <a:rPr lang="ko-KR" altLang="en-US" smtClean="0"/>
-              <a:t>2026-05-18</a:t>
+              <a:t>2026-05-27</a:t>
             </a:fld>
             <a:endParaRPr lang="ko-KR" altLang="en-US"/>
           </a:p>
@@ -2671,7 +2671,7 @@
           <a:p>
             <a:fld id="{9FF286C0-AED3-4EB2-81B2-2C6EA95602B7}" type="datetimeFigureOut">
               <a:rPr lang="ko-KR" altLang="en-US" smtClean="0"/>
-              <a:t>2026-05-18</a:t>
+              <a:t>2026-05-27</a:t>
             </a:fld>
             <a:endParaRPr lang="ko-KR" altLang="en-US"/>
           </a:p>
@@ -2912,7 +2912,7 @@
           <a:p>
             <a:fld id="{9FF286C0-AED3-4EB2-81B2-2C6EA95602B7}" type="datetimeFigureOut">
               <a:rPr lang="ko-KR" altLang="en-US" smtClean="0"/>
-              <a:t>2026-05-18</a:t>
+              <a:t>2026-05-27</a:t>
             </a:fld>
             <a:endParaRPr lang="ko-KR" altLang="en-US"/>
           </a:p>
@@ -3339,10 +3339,10 @@
       </p:grpSpPr>
       <p:grpSp>
         <p:nvGrpSpPr>
-          <p:cNvPr id="68" name="그룹 67">
+          <p:cNvPr id="3" name="그룹 2">
             <a:extLst>
               <a:ext uri="{FF2B5EF4-FFF2-40B4-BE49-F238E27FC236}">
-                <a16:creationId xmlns:a16="http://schemas.microsoft.com/office/drawing/2014/main" id="{04E2B284-3035-4304-7694-580CA6325023}"/>
+                <a16:creationId xmlns:a16="http://schemas.microsoft.com/office/drawing/2014/main" id="{40877D16-10F2-146E-7C0E-01F45A71E7E7}"/>
               </a:ext>
             </a:extLst>
           </p:cNvPr>
@@ -3459,6 +3459,14 @@
             <a:lstStyle/>
             <a:p>
               <a:pPr algn="ctr"/>
+              <a:r>
+                <a:rPr lang="en-US" altLang="ko-KR" dirty="0">
+                  <a:solidFill>
+                    <a:schemeClr val="tx1"/>
+                  </a:solidFill>
+                </a:rPr>
+                <a:t>[Top Bar]</a:t>
+              </a:r>
               <a:endParaRPr lang="ko-KR" altLang="en-US" dirty="0">
                 <a:solidFill>
                   <a:schemeClr val="tx1"/>
@@ -3513,7 +3521,15 @@
             </a:bodyPr>
             <a:lstStyle/>
             <a:p>
-              <a:pPr algn="ctr"/>
+              <a:pPr algn="r"/>
+              <a:r>
+                <a:rPr lang="en-US" altLang="ko-KR" dirty="0">
+                  <a:solidFill>
+                    <a:schemeClr val="tx1"/>
+                  </a:solidFill>
+                </a:rPr>
+                <a:t>[Menu Bar]</a:t>
+              </a:r>
               <a:endParaRPr lang="ko-KR" altLang="en-US" dirty="0">
                 <a:solidFill>
                   <a:schemeClr val="tx1"/>
@@ -3570,7 +3586,15 @@
             </a:bodyPr>
             <a:lstStyle/>
             <a:p>
-              <a:pPr algn="ctr"/>
+              <a:pPr algn="r"/>
+              <a:r>
+                <a:rPr lang="en-US" altLang="ko-KR" dirty="0">
+                  <a:solidFill>
+                    <a:schemeClr val="tx1"/>
+                  </a:solidFill>
+                </a:rPr>
+                <a:t>[Tool Bar]</a:t>
+              </a:r>
               <a:endParaRPr lang="ko-KR" altLang="en-US" dirty="0">
                 <a:solidFill>
                   <a:schemeClr val="tx1"/>
@@ -4848,71 +4872,6 @@
                   </a:solidFill>
                 </a:rPr>
                 <a:t>Pause</a:t>
-              </a:r>
-              <a:endParaRPr lang="ko-KR" altLang="en-US" dirty="0">
-                <a:solidFill>
-                  <a:schemeClr val="tx1"/>
-                </a:solidFill>
-              </a:endParaRPr>
-            </a:p>
-          </p:txBody>
-        </p:sp>
-        <p:sp>
-          <p:nvSpPr>
-            <p:cNvPr id="36" name="직사각형 35">
-              <a:extLst>
-                <a:ext uri="{FF2B5EF4-FFF2-40B4-BE49-F238E27FC236}">
-                  <a16:creationId xmlns:a16="http://schemas.microsoft.com/office/drawing/2014/main" id="{EF3FB52A-F751-2639-72F7-020CBBD8C7D9}"/>
-                </a:ext>
-              </a:extLst>
-            </p:cNvPr>
-            <p:cNvSpPr/>
-            <p:nvPr/>
-          </p:nvSpPr>
-          <p:spPr>
-            <a:xfrm>
-              <a:off x="10980000" y="360000"/>
-              <a:ext cx="540000" cy="180000"/>
-            </a:xfrm>
-            <a:prstGeom prst="rect">
-              <a:avLst/>
-            </a:prstGeom>
-            <a:solidFill>
-              <a:schemeClr val="bg1">
-                <a:lumMod val="85000"/>
-              </a:schemeClr>
-            </a:solidFill>
-          </p:spPr>
-          <p:style>
-            <a:lnRef idx="2">
-              <a:schemeClr val="accent1">
-                <a:shade val="15000"/>
-              </a:schemeClr>
-            </a:lnRef>
-            <a:fillRef idx="1">
-              <a:schemeClr val="accent1"/>
-            </a:fillRef>
-            <a:effectRef idx="0">
-              <a:schemeClr val="accent1"/>
-            </a:effectRef>
-            <a:fontRef idx="minor">
-              <a:schemeClr val="lt1"/>
-            </a:fontRef>
-          </p:style>
-          <p:txBody>
-            <a:bodyPr rtlCol="0" anchor="ctr">
-              <a:normAutofit fontScale="40000" lnSpcReduction="20000"/>
-            </a:bodyPr>
-            <a:lstStyle/>
-            <a:p>
-              <a:pPr algn="ctr"/>
-              <a:r>
-                <a:rPr lang="en-US" altLang="ko-KR" dirty="0">
-                  <a:solidFill>
-                    <a:schemeClr val="tx1"/>
-                  </a:solidFill>
-                </a:rPr>
-                <a:t>Layout</a:t>
               </a:r>
               <a:endParaRPr lang="ko-KR" altLang="en-US" dirty="0">
                 <a:solidFill>
@@ -5965,7 +5924,7 @@
                     <a:schemeClr val="tx1"/>
                   </a:solidFill>
                 </a:rPr>
-                <a:t>Help</a:t>
+                <a:t>Layout</a:t>
               </a:r>
               <a:endParaRPr lang="ko-KR" altLang="en-US" dirty="0">
                 <a:solidFill>
@@ -6274,6 +6233,69 @@
                 </a:rPr>
                 <a:t>파일 경로</a:t>
               </a:r>
+            </a:p>
+          </p:txBody>
+        </p:sp>
+        <p:sp>
+          <p:nvSpPr>
+            <p:cNvPr id="2" name="직사각형 1">
+              <a:extLst>
+                <a:ext uri="{FF2B5EF4-FFF2-40B4-BE49-F238E27FC236}">
+                  <a16:creationId xmlns:a16="http://schemas.microsoft.com/office/drawing/2014/main" id="{1995F878-576B-6ACC-A1DD-AC016EB83E49}"/>
+                </a:ext>
+              </a:extLst>
+            </p:cNvPr>
+            <p:cNvSpPr/>
+            <p:nvPr/>
+          </p:nvSpPr>
+          <p:spPr>
+            <a:xfrm>
+              <a:off x="1440000" y="180000"/>
+              <a:ext cx="540000" cy="180000"/>
+            </a:xfrm>
+            <a:prstGeom prst="rect">
+              <a:avLst/>
+            </a:prstGeom>
+            <a:solidFill>
+              <a:schemeClr val="bg1"/>
+            </a:solidFill>
+          </p:spPr>
+          <p:style>
+            <a:lnRef idx="2">
+              <a:schemeClr val="accent1">
+                <a:shade val="15000"/>
+              </a:schemeClr>
+            </a:lnRef>
+            <a:fillRef idx="1">
+              <a:schemeClr val="accent1"/>
+            </a:fillRef>
+            <a:effectRef idx="0">
+              <a:schemeClr val="accent1"/>
+            </a:effectRef>
+            <a:fontRef idx="minor">
+              <a:schemeClr val="lt1"/>
+            </a:fontRef>
+          </p:style>
+          <p:txBody>
+            <a:bodyPr rtlCol="0" anchor="ctr">
+              <a:normAutofit fontScale="40000" lnSpcReduction="20000"/>
+            </a:bodyPr>
+            <a:lstStyle/>
+            <a:p>
+              <a:pPr algn="ctr"/>
+              <a:r>
+                <a:rPr lang="en-US" altLang="ko-KR" dirty="0">
+                  <a:solidFill>
+                    <a:schemeClr val="tx1"/>
+                  </a:solidFill>
+                </a:rPr>
+                <a:t>Help</a:t>
+              </a:r>
+              <a:endParaRPr lang="ko-KR" altLang="en-US" dirty="0">
+                <a:solidFill>
+                  <a:schemeClr val="tx1"/>
+                </a:solidFill>
+              </a:endParaRPr>
             </a:p>
           </p:txBody>
         </p:sp>

--- a/Proto/Layout/layout.pptx
+++ b/Proto/Layout/layout.pptx
@@ -262,7 +262,7 @@
           <a:p>
             <a:fld id="{9FF286C0-AED3-4EB2-81B2-2C6EA95602B7}" type="datetimeFigureOut">
               <a:rPr lang="ko-KR" altLang="en-US" smtClean="0"/>
-              <a:t>2026-05-27</a:t>
+              <a:t>2026-05-28</a:t>
             </a:fld>
             <a:endParaRPr lang="ko-KR" altLang="en-US"/>
           </a:p>
@@ -460,7 +460,7 @@
           <a:p>
             <a:fld id="{9FF286C0-AED3-4EB2-81B2-2C6EA95602B7}" type="datetimeFigureOut">
               <a:rPr lang="ko-KR" altLang="en-US" smtClean="0"/>
-              <a:t>2026-05-27</a:t>
+              <a:t>2026-05-28</a:t>
             </a:fld>
             <a:endParaRPr lang="ko-KR" altLang="en-US"/>
           </a:p>
@@ -668,7 +668,7 @@
           <a:p>
             <a:fld id="{9FF286C0-AED3-4EB2-81B2-2C6EA95602B7}" type="datetimeFigureOut">
               <a:rPr lang="ko-KR" altLang="en-US" smtClean="0"/>
-              <a:t>2026-05-27</a:t>
+              <a:t>2026-05-28</a:t>
             </a:fld>
             <a:endParaRPr lang="ko-KR" altLang="en-US"/>
           </a:p>
@@ -866,7 +866,7 @@
           <a:p>
             <a:fld id="{9FF286C0-AED3-4EB2-81B2-2C6EA95602B7}" type="datetimeFigureOut">
               <a:rPr lang="ko-KR" altLang="en-US" smtClean="0"/>
-              <a:t>2026-05-27</a:t>
+              <a:t>2026-05-28</a:t>
             </a:fld>
             <a:endParaRPr lang="ko-KR" altLang="en-US"/>
           </a:p>
@@ -1141,7 +1141,7 @@
           <a:p>
             <a:fld id="{9FF286C0-AED3-4EB2-81B2-2C6EA95602B7}" type="datetimeFigureOut">
               <a:rPr lang="ko-KR" altLang="en-US" smtClean="0"/>
-              <a:t>2026-05-27</a:t>
+              <a:t>2026-05-28</a:t>
             </a:fld>
             <a:endParaRPr lang="ko-KR" altLang="en-US"/>
           </a:p>
@@ -1406,7 +1406,7 @@
           <a:p>
             <a:fld id="{9FF286C0-AED3-4EB2-81B2-2C6EA95602B7}" type="datetimeFigureOut">
               <a:rPr lang="ko-KR" altLang="en-US" smtClean="0"/>
-              <a:t>2026-05-27</a:t>
+              <a:t>2026-05-28</a:t>
             </a:fld>
             <a:endParaRPr lang="ko-KR" altLang="en-US"/>
           </a:p>
@@ -1818,7 +1818,7 @@
           <a:p>
             <a:fld id="{9FF286C0-AED3-4EB2-81B2-2C6EA95602B7}" type="datetimeFigureOut">
               <a:rPr lang="ko-KR" altLang="en-US" smtClean="0"/>
-              <a:t>2026-05-27</a:t>
+              <a:t>2026-05-28</a:t>
             </a:fld>
             <a:endParaRPr lang="ko-KR" altLang="en-US"/>
           </a:p>
@@ -1959,7 +1959,7 @@
           <a:p>
             <a:fld id="{9FF286C0-AED3-4EB2-81B2-2C6EA95602B7}" type="datetimeFigureOut">
               <a:rPr lang="ko-KR" altLang="en-US" smtClean="0"/>
-              <a:t>2026-05-27</a:t>
+              <a:t>2026-05-28</a:t>
             </a:fld>
             <a:endParaRPr lang="ko-KR" altLang="en-US"/>
           </a:p>
@@ -2072,7 +2072,7 @@
           <a:p>
             <a:fld id="{9FF286C0-AED3-4EB2-81B2-2C6EA95602B7}" type="datetimeFigureOut">
               <a:rPr lang="ko-KR" altLang="en-US" smtClean="0"/>
-              <a:t>2026-05-27</a:t>
+              <a:t>2026-05-28</a:t>
             </a:fld>
             <a:endParaRPr lang="ko-KR" altLang="en-US"/>
           </a:p>
@@ -2383,7 +2383,7 @@
           <a:p>
             <a:fld id="{9FF286C0-AED3-4EB2-81B2-2C6EA95602B7}" type="datetimeFigureOut">
               <a:rPr lang="ko-KR" altLang="en-US" smtClean="0"/>
-              <a:t>2026-05-27</a:t>
+              <a:t>2026-05-28</a:t>
             </a:fld>
             <a:endParaRPr lang="ko-KR" altLang="en-US"/>
           </a:p>
@@ -2671,7 +2671,7 @@
           <a:p>
             <a:fld id="{9FF286C0-AED3-4EB2-81B2-2C6EA95602B7}" type="datetimeFigureOut">
               <a:rPr lang="ko-KR" altLang="en-US" smtClean="0"/>
-              <a:t>2026-05-27</a:t>
+              <a:t>2026-05-28</a:t>
             </a:fld>
             <a:endParaRPr lang="ko-KR" altLang="en-US"/>
           </a:p>
@@ -2912,7 +2912,7 @@
           <a:p>
             <a:fld id="{9FF286C0-AED3-4EB2-81B2-2C6EA95602B7}" type="datetimeFigureOut">
               <a:rPr lang="ko-KR" altLang="en-US" smtClean="0"/>
-              <a:t>2026-05-27</a:t>
+              <a:t>2026-05-28</a:t>
             </a:fld>
             <a:endParaRPr lang="ko-KR" altLang="en-US"/>
           </a:p>
@@ -7110,10 +7110,10 @@
       </p:grpSp>
       <p:grpSp>
         <p:nvGrpSpPr>
-          <p:cNvPr id="94" name="그룹 93">
+          <p:cNvPr id="97" name="그룹 96">
             <a:extLst>
               <a:ext uri="{FF2B5EF4-FFF2-40B4-BE49-F238E27FC236}">
-                <a16:creationId xmlns:a16="http://schemas.microsoft.com/office/drawing/2014/main" id="{576AB074-6A75-825F-3A0C-B96C74046C02}"/>
+                <a16:creationId xmlns:a16="http://schemas.microsoft.com/office/drawing/2014/main" id="{55CE84C4-5641-4FEE-5C90-ADB0738C1D99}"/>
               </a:ext>
             </a:extLst>
           </p:cNvPr>
@@ -7238,6 +7238,30 @@
             <a:lstStyle/>
             <a:p>
               <a:pPr algn="ctr"/>
+              <a:r>
+                <a:rPr lang="en-US" altLang="ko-KR" dirty="0">
+                  <a:solidFill>
+                    <a:schemeClr val="tx1"/>
+                  </a:solidFill>
+                </a:rPr>
+                <a:t>Project</a:t>
+              </a:r>
+              <a:r>
+                <a:rPr lang="ko-KR" altLang="en-US" dirty="0">
+                  <a:solidFill>
+                    <a:schemeClr val="tx1"/>
+                  </a:solidFill>
+                </a:rPr>
+                <a:t> </a:t>
+              </a:r>
+              <a:r>
+                <a:rPr lang="en-US" altLang="ko-KR" dirty="0">
+                  <a:solidFill>
+                    <a:schemeClr val="tx1"/>
+                  </a:solidFill>
+                </a:rPr>
+                <a:t>Settings</a:t>
+              </a:r>
               <a:endParaRPr lang="ko-KR" altLang="en-US" dirty="0">
                 <a:solidFill>
                   <a:schemeClr val="tx1"/>

--- a/Proto/Layout/layout.pptx
+++ b/Proto/Layout/layout.pptx
@@ -262,7 +262,7 @@
           <a:p>
             <a:fld id="{9FF286C0-AED3-4EB2-81B2-2C6EA95602B7}" type="datetimeFigureOut">
               <a:rPr lang="ko-KR" altLang="en-US" smtClean="0"/>
-              <a:t>2026-05-28</a:t>
+              <a:t>2026-05-30</a:t>
             </a:fld>
             <a:endParaRPr lang="ko-KR" altLang="en-US"/>
           </a:p>
@@ -460,7 +460,7 @@
           <a:p>
             <a:fld id="{9FF286C0-AED3-4EB2-81B2-2C6EA95602B7}" type="datetimeFigureOut">
               <a:rPr lang="ko-KR" altLang="en-US" smtClean="0"/>
-              <a:t>2026-05-28</a:t>
+              <a:t>2026-05-30</a:t>
             </a:fld>
             <a:endParaRPr lang="ko-KR" altLang="en-US"/>
           </a:p>
@@ -668,7 +668,7 @@
           <a:p>
             <a:fld id="{9FF286C0-AED3-4EB2-81B2-2C6EA95602B7}" type="datetimeFigureOut">
               <a:rPr lang="ko-KR" altLang="en-US" smtClean="0"/>
-              <a:t>2026-05-28</a:t>
+              <a:t>2026-05-30</a:t>
             </a:fld>
             <a:endParaRPr lang="ko-KR" altLang="en-US"/>
           </a:p>
@@ -866,7 +866,7 @@
           <a:p>
             <a:fld id="{9FF286C0-AED3-4EB2-81B2-2C6EA95602B7}" type="datetimeFigureOut">
               <a:rPr lang="ko-KR" altLang="en-US" smtClean="0"/>
-              <a:t>2026-05-28</a:t>
+              <a:t>2026-05-30</a:t>
             </a:fld>
             <a:endParaRPr lang="ko-KR" altLang="en-US"/>
           </a:p>
@@ -1141,7 +1141,7 @@
           <a:p>
             <a:fld id="{9FF286C0-AED3-4EB2-81B2-2C6EA95602B7}" type="datetimeFigureOut">
               <a:rPr lang="ko-KR" altLang="en-US" smtClean="0"/>
-              <a:t>2026-05-28</a:t>
+              <a:t>2026-05-30</a:t>
             </a:fld>
             <a:endParaRPr lang="ko-KR" altLang="en-US"/>
           </a:p>
@@ -1406,7 +1406,7 @@
           <a:p>
             <a:fld id="{9FF286C0-AED3-4EB2-81B2-2C6EA95602B7}" type="datetimeFigureOut">
               <a:rPr lang="ko-KR" altLang="en-US" smtClean="0"/>
-              <a:t>2026-05-28</a:t>
+              <a:t>2026-05-30</a:t>
             </a:fld>
             <a:endParaRPr lang="ko-KR" altLang="en-US"/>
           </a:p>
@@ -1818,7 +1818,7 @@
           <a:p>
             <a:fld id="{9FF286C0-AED3-4EB2-81B2-2C6EA95602B7}" type="datetimeFigureOut">
               <a:rPr lang="ko-KR" altLang="en-US" smtClean="0"/>
-              <a:t>2026-05-28</a:t>
+              <a:t>2026-05-30</a:t>
             </a:fld>
             <a:endParaRPr lang="ko-KR" altLang="en-US"/>
           </a:p>
@@ -1959,7 +1959,7 @@
           <a:p>
             <a:fld id="{9FF286C0-AED3-4EB2-81B2-2C6EA95602B7}" type="datetimeFigureOut">
               <a:rPr lang="ko-KR" altLang="en-US" smtClean="0"/>
-              <a:t>2026-05-28</a:t>
+              <a:t>2026-05-30</a:t>
             </a:fld>
             <a:endParaRPr lang="ko-KR" altLang="en-US"/>
           </a:p>
@@ -2072,7 +2072,7 @@
           <a:p>
             <a:fld id="{9FF286C0-AED3-4EB2-81B2-2C6EA95602B7}" type="datetimeFigureOut">
               <a:rPr lang="ko-KR" altLang="en-US" smtClean="0"/>
-              <a:t>2026-05-28</a:t>
+              <a:t>2026-05-30</a:t>
             </a:fld>
             <a:endParaRPr lang="ko-KR" altLang="en-US"/>
           </a:p>
@@ -2383,7 +2383,7 @@
           <a:p>
             <a:fld id="{9FF286C0-AED3-4EB2-81B2-2C6EA95602B7}" type="datetimeFigureOut">
               <a:rPr lang="ko-KR" altLang="en-US" smtClean="0"/>
-              <a:t>2026-05-28</a:t>
+              <a:t>2026-05-30</a:t>
             </a:fld>
             <a:endParaRPr lang="ko-KR" altLang="en-US"/>
           </a:p>
@@ -2671,7 +2671,7 @@
           <a:p>
             <a:fld id="{9FF286C0-AED3-4EB2-81B2-2C6EA95602B7}" type="datetimeFigureOut">
               <a:rPr lang="ko-KR" altLang="en-US" smtClean="0"/>
-              <a:t>2026-05-28</a:t>
+              <a:t>2026-05-30</a:t>
             </a:fld>
             <a:endParaRPr lang="ko-KR" altLang="en-US"/>
           </a:p>
@@ -2912,7 +2912,7 @@
           <a:p>
             <a:fld id="{9FF286C0-AED3-4EB2-81B2-2C6EA95602B7}" type="datetimeFigureOut">
               <a:rPr lang="ko-KR" altLang="en-US" smtClean="0"/>
-              <a:t>2026-05-28</a:t>
+              <a:t>2026-05-30</a:t>
             </a:fld>
             <a:endParaRPr lang="ko-KR" altLang="en-US"/>
           </a:p>
@@ -6332,10 +6332,10 @@
       </p:grpSpPr>
       <p:grpSp>
         <p:nvGrpSpPr>
-          <p:cNvPr id="15" name="그룹 14">
+          <p:cNvPr id="94" name="그룹 93">
             <a:extLst>
               <a:ext uri="{FF2B5EF4-FFF2-40B4-BE49-F238E27FC236}">
-                <a16:creationId xmlns:a16="http://schemas.microsoft.com/office/drawing/2014/main" id="{37E48F3B-0ECB-023A-950A-2B56DA708C68}"/>
+                <a16:creationId xmlns:a16="http://schemas.microsoft.com/office/drawing/2014/main" id="{AA113E7D-8F26-7E8C-69AB-BF8982D3EB6E}"/>
               </a:ext>
             </a:extLst>
           </p:cNvPr>
@@ -6766,7 +6766,7 @@
                     <a:schemeClr val="tx1"/>
                   </a:solidFill>
                 </a:rPr>
-                <a:t>As Scene</a:t>
+                <a:t>Scene</a:t>
               </a:r>
               <a:r>
                 <a:rPr lang="ko-KR" altLang="en-US" dirty="0">
@@ -6782,7 +6782,7 @@
                     <a:schemeClr val="tx1"/>
                   </a:solidFill>
                 </a:rPr>
-                <a:t>(Ctrl + Shift + S)</a:t>
+                <a:t>As (Ctrl + Shift + S)</a:t>
               </a:r>
               <a:endParaRPr lang="ko-KR" altLang="en-US" dirty="0">
                 <a:solidFill>
@@ -9060,10 +9060,10 @@
       </p:grpSp>
       <p:grpSp>
         <p:nvGrpSpPr>
-          <p:cNvPr id="102" name="그룹 101">
+          <p:cNvPr id="15" name="그룹 14">
             <a:extLst>
               <a:ext uri="{FF2B5EF4-FFF2-40B4-BE49-F238E27FC236}">
-                <a16:creationId xmlns:a16="http://schemas.microsoft.com/office/drawing/2014/main" id="{7A103D66-F9AF-1DA3-8DE3-37015B18A4AA}"/>
+                <a16:creationId xmlns:a16="http://schemas.microsoft.com/office/drawing/2014/main" id="{0C50DABD-5C12-EB32-37D6-264F78CA33E1}"/>
               </a:ext>
             </a:extLst>
           </p:cNvPr>
@@ -9281,7 +9281,7 @@
           </p:nvSpPr>
           <p:spPr>
             <a:xfrm>
-              <a:off x="7200000" y="1800000"/>
+              <a:off x="7200000" y="1620000"/>
               <a:ext cx="1440000" cy="180000"/>
             </a:xfrm>
             <a:prstGeom prst="rect">
@@ -9569,12 +9569,12 @@
             <a:p>
               <a:pPr algn="ctr"/>
               <a:r>
-                <a:rPr lang="en-US" altLang="ko-KR" dirty="0">
+                <a:rPr lang="en-US" altLang="ko-KR">
                   <a:solidFill>
                     <a:schemeClr val="tx1"/>
                   </a:solidFill>
                 </a:rPr>
-                <a:t>Text</a:t>
+                <a:t>Camera</a:t>
               </a:r>
               <a:endParaRPr lang="ko-KR" altLang="en-US" dirty="0">
                 <a:solidFill>
@@ -9590,6 +9590,61 @@
               <a:extLst>
                 <a:ext uri="{FF2B5EF4-FFF2-40B4-BE49-F238E27FC236}">
                   <a16:creationId xmlns:a16="http://schemas.microsoft.com/office/drawing/2014/main" id="{9CCAE4C8-BACE-7D51-3886-8BF035B5801C}"/>
+                </a:ext>
+              </a:extLst>
+            </p:cNvPr>
+            <p:cNvSpPr/>
+            <p:nvPr/>
+          </p:nvSpPr>
+          <p:spPr>
+            <a:xfrm>
+              <a:off x="7200000" y="1800000"/>
+              <a:ext cx="1440000" cy="180000"/>
+            </a:xfrm>
+            <a:prstGeom prst="rect">
+              <a:avLst/>
+            </a:prstGeom>
+            <a:solidFill>
+              <a:schemeClr val="bg1"/>
+            </a:solidFill>
+          </p:spPr>
+          <p:style>
+            <a:lnRef idx="2">
+              <a:schemeClr val="accent1">
+                <a:shade val="15000"/>
+              </a:schemeClr>
+            </a:lnRef>
+            <a:fillRef idx="1">
+              <a:schemeClr val="accent1"/>
+            </a:fillRef>
+            <a:effectRef idx="0">
+              <a:schemeClr val="accent1"/>
+            </a:effectRef>
+            <a:fontRef idx="minor">
+              <a:schemeClr val="lt1"/>
+            </a:fontRef>
+          </p:style>
+          <p:txBody>
+            <a:bodyPr rtlCol="0" anchor="ctr">
+              <a:normAutofit fontScale="40000" lnSpcReduction="20000"/>
+            </a:bodyPr>
+            <a:lstStyle/>
+            <a:p>
+              <a:pPr algn="ctr"/>
+              <a:endParaRPr lang="ko-KR" altLang="en-US" dirty="0">
+                <a:solidFill>
+                  <a:schemeClr val="tx1"/>
+                </a:solidFill>
+              </a:endParaRPr>
+            </a:p>
+          </p:txBody>
+        </p:sp>
+        <p:sp>
+          <p:nvSpPr>
+            <p:cNvPr id="59" name="직사각형 58">
+              <a:extLst>
+                <a:ext uri="{FF2B5EF4-FFF2-40B4-BE49-F238E27FC236}">
+                  <a16:creationId xmlns:a16="http://schemas.microsoft.com/office/drawing/2014/main" id="{E789D059-F76D-ED77-F640-DD85F1662CC3}"/>
                 </a:ext>
               </a:extLst>
             </p:cNvPr>
@@ -9637,69 +9692,6 @@
                     <a:schemeClr val="tx1"/>
                   </a:solidFill>
                 </a:rPr>
-                <a:t>Camera</a:t>
-              </a:r>
-              <a:endParaRPr lang="ko-KR" altLang="en-US" dirty="0">
-                <a:solidFill>
-                  <a:schemeClr val="tx1"/>
-                </a:solidFill>
-              </a:endParaRPr>
-            </a:p>
-          </p:txBody>
-        </p:sp>
-        <p:sp>
-          <p:nvSpPr>
-            <p:cNvPr id="59" name="직사각형 58">
-              <a:extLst>
-                <a:ext uri="{FF2B5EF4-FFF2-40B4-BE49-F238E27FC236}">
-                  <a16:creationId xmlns:a16="http://schemas.microsoft.com/office/drawing/2014/main" id="{E789D059-F76D-ED77-F640-DD85F1662CC3}"/>
-                </a:ext>
-              </a:extLst>
-            </p:cNvPr>
-            <p:cNvSpPr/>
-            <p:nvPr/>
-          </p:nvSpPr>
-          <p:spPr>
-            <a:xfrm>
-              <a:off x="7200000" y="1440000"/>
-              <a:ext cx="1440000" cy="180000"/>
-            </a:xfrm>
-            <a:prstGeom prst="rect">
-              <a:avLst/>
-            </a:prstGeom>
-            <a:solidFill>
-              <a:schemeClr val="bg1"/>
-            </a:solidFill>
-          </p:spPr>
-          <p:style>
-            <a:lnRef idx="2">
-              <a:schemeClr val="accent1">
-                <a:shade val="15000"/>
-              </a:schemeClr>
-            </a:lnRef>
-            <a:fillRef idx="1">
-              <a:schemeClr val="accent1"/>
-            </a:fillRef>
-            <a:effectRef idx="0">
-              <a:schemeClr val="accent1"/>
-            </a:effectRef>
-            <a:fontRef idx="minor">
-              <a:schemeClr val="lt1"/>
-            </a:fontRef>
-          </p:style>
-          <p:txBody>
-            <a:bodyPr rtlCol="0" anchor="ctr">
-              <a:normAutofit fontScale="40000" lnSpcReduction="20000"/>
-            </a:bodyPr>
-            <a:lstStyle/>
-            <a:p>
-              <a:pPr algn="ctr"/>
-              <a:r>
-                <a:rPr lang="en-US" altLang="ko-KR" dirty="0">
-                  <a:solidFill>
-                    <a:schemeClr val="tx1"/>
-                  </a:solidFill>
-                </a:rPr>
                 <a:t>UI</a:t>
               </a:r>
               <a:endParaRPr lang="ko-KR" altLang="en-US" dirty="0">
@@ -9724,7 +9716,7 @@
           </p:nvSpPr>
           <p:spPr>
             <a:xfrm>
-              <a:off x="7200000" y="1620000"/>
+              <a:off x="7200000" y="1440000"/>
               <a:ext cx="1440000" cy="180000"/>
             </a:xfrm>
             <a:prstGeom prst="rect">
@@ -12070,14 +12062,14 @@
           <p:nvPr>
             <p:extLst>
               <p:ext uri="{D42A27DB-BD31-4B8C-83A1-F6EECF244321}">
-                <p14:modId xmlns:p14="http://schemas.microsoft.com/office/powerpoint/2010/main" val="2622685191"/>
+                <p14:modId xmlns:p14="http://schemas.microsoft.com/office/powerpoint/2010/main" val="1692452459"/>
               </p:ext>
             </p:extLst>
           </p:nvPr>
         </p:nvGraphicFramePr>
         <p:xfrm>
           <a:off x="2032000" y="0"/>
-          <a:ext cx="8128000" cy="6035040"/>
+          <a:ext cx="8128000" cy="6309360"/>
         </p:xfrm>
         <a:graphic>
           <a:graphicData uri="http://schemas.openxmlformats.org/drawingml/2006/table">
@@ -12951,6 +12943,43 @@
                   </a:ext>
                 </a:extLst>
               </a:tr>
+              <a:tr h="180000">
+                <a:tc>
+                  <a:txBody>
+                    <a:bodyPr/>
+                    <a:lstStyle/>
+                    <a:p>
+                      <a:pPr algn="ctr" latinLnBrk="1"/>
+                      <a:r>
+                        <a:rPr lang="en-US" altLang="ko-KR" sz="1200" dirty="0"/>
+                        <a:t>F2</a:t>
+                      </a:r>
+                      <a:endParaRPr lang="ko-KR" altLang="en-US" sz="1200" dirty="0"/>
+                    </a:p>
+                  </a:txBody>
+                  <a:tcPr anchor="ctr"/>
+                </a:tc>
+                <a:tc>
+                  <a:txBody>
+                    <a:bodyPr/>
+                    <a:lstStyle/>
+                    <a:p>
+                      <a:pPr algn="ctr" latinLnBrk="1"/>
+                      <a:r>
+                        <a:rPr lang="en-US" altLang="ko-KR" sz="1200" dirty="0"/>
+                        <a:t>Change Name</a:t>
+                      </a:r>
+                      <a:endParaRPr lang="ko-KR" altLang="en-US" sz="1200" dirty="0"/>
+                    </a:p>
+                  </a:txBody>
+                  <a:tcPr anchor="ctr"/>
+                </a:tc>
+                <a:extLst>
+                  <a:ext uri="{0D108BD9-81ED-4DB2-BD59-A6C34878D82A}">
+                    <a16:rowId xmlns:a16="http://schemas.microsoft.com/office/drawing/2014/main" val="3459486331"/>
+                  </a:ext>
+                </a:extLst>
+              </a:tr>
             </a:tbl>
           </a:graphicData>
         </a:graphic>

--- a/Proto/Layout/layout.pptx
+++ b/Proto/Layout/layout.pptx
@@ -262,7 +262,7 @@
           <a:p>
             <a:fld id="{9FF286C0-AED3-4EB2-81B2-2C6EA95602B7}" type="datetimeFigureOut">
               <a:rPr lang="ko-KR" altLang="en-US" smtClean="0"/>
-              <a:t>2026-05-30</a:t>
+              <a:t>2026-06-04</a:t>
             </a:fld>
             <a:endParaRPr lang="ko-KR" altLang="en-US"/>
           </a:p>
@@ -460,7 +460,7 @@
           <a:p>
             <a:fld id="{9FF286C0-AED3-4EB2-81B2-2C6EA95602B7}" type="datetimeFigureOut">
               <a:rPr lang="ko-KR" altLang="en-US" smtClean="0"/>
-              <a:t>2026-05-30</a:t>
+              <a:t>2026-06-04</a:t>
             </a:fld>
             <a:endParaRPr lang="ko-KR" altLang="en-US"/>
           </a:p>
@@ -668,7 +668,7 @@
           <a:p>
             <a:fld id="{9FF286C0-AED3-4EB2-81B2-2C6EA95602B7}" type="datetimeFigureOut">
               <a:rPr lang="ko-KR" altLang="en-US" smtClean="0"/>
-              <a:t>2026-05-30</a:t>
+              <a:t>2026-06-04</a:t>
             </a:fld>
             <a:endParaRPr lang="ko-KR" altLang="en-US"/>
           </a:p>
@@ -866,7 +866,7 @@
           <a:p>
             <a:fld id="{9FF286C0-AED3-4EB2-81B2-2C6EA95602B7}" type="datetimeFigureOut">
               <a:rPr lang="ko-KR" altLang="en-US" smtClean="0"/>
-              <a:t>2026-05-30</a:t>
+              <a:t>2026-06-04</a:t>
             </a:fld>
             <a:endParaRPr lang="ko-KR" altLang="en-US"/>
           </a:p>
@@ -1141,7 +1141,7 @@
           <a:p>
             <a:fld id="{9FF286C0-AED3-4EB2-81B2-2C6EA95602B7}" type="datetimeFigureOut">
               <a:rPr lang="ko-KR" altLang="en-US" smtClean="0"/>
-              <a:t>2026-05-30</a:t>
+              <a:t>2026-06-04</a:t>
             </a:fld>
             <a:endParaRPr lang="ko-KR" altLang="en-US"/>
           </a:p>
@@ -1406,7 +1406,7 @@
           <a:p>
             <a:fld id="{9FF286C0-AED3-4EB2-81B2-2C6EA95602B7}" type="datetimeFigureOut">
               <a:rPr lang="ko-KR" altLang="en-US" smtClean="0"/>
-              <a:t>2026-05-30</a:t>
+              <a:t>2026-06-04</a:t>
             </a:fld>
             <a:endParaRPr lang="ko-KR" altLang="en-US"/>
           </a:p>
@@ -1818,7 +1818,7 @@
           <a:p>
             <a:fld id="{9FF286C0-AED3-4EB2-81B2-2C6EA95602B7}" type="datetimeFigureOut">
               <a:rPr lang="ko-KR" altLang="en-US" smtClean="0"/>
-              <a:t>2026-05-30</a:t>
+              <a:t>2026-06-04</a:t>
             </a:fld>
             <a:endParaRPr lang="ko-KR" altLang="en-US"/>
           </a:p>
@@ -1959,7 +1959,7 @@
           <a:p>
             <a:fld id="{9FF286C0-AED3-4EB2-81B2-2C6EA95602B7}" type="datetimeFigureOut">
               <a:rPr lang="ko-KR" altLang="en-US" smtClean="0"/>
-              <a:t>2026-05-30</a:t>
+              <a:t>2026-06-04</a:t>
             </a:fld>
             <a:endParaRPr lang="ko-KR" altLang="en-US"/>
           </a:p>
@@ -2072,7 +2072,7 @@
           <a:p>
             <a:fld id="{9FF286C0-AED3-4EB2-81B2-2C6EA95602B7}" type="datetimeFigureOut">
               <a:rPr lang="ko-KR" altLang="en-US" smtClean="0"/>
-              <a:t>2026-05-30</a:t>
+              <a:t>2026-06-04</a:t>
             </a:fld>
             <a:endParaRPr lang="ko-KR" altLang="en-US"/>
           </a:p>
@@ -2383,7 +2383,7 @@
           <a:p>
             <a:fld id="{9FF286C0-AED3-4EB2-81B2-2C6EA95602B7}" type="datetimeFigureOut">
               <a:rPr lang="ko-KR" altLang="en-US" smtClean="0"/>
-              <a:t>2026-05-30</a:t>
+              <a:t>2026-06-04</a:t>
             </a:fld>
             <a:endParaRPr lang="ko-KR" altLang="en-US"/>
           </a:p>
@@ -2671,7 +2671,7 @@
           <a:p>
             <a:fld id="{9FF286C0-AED3-4EB2-81B2-2C6EA95602B7}" type="datetimeFigureOut">
               <a:rPr lang="ko-KR" altLang="en-US" smtClean="0"/>
-              <a:t>2026-05-30</a:t>
+              <a:t>2026-06-04</a:t>
             </a:fld>
             <a:endParaRPr lang="ko-KR" altLang="en-US"/>
           </a:p>
@@ -2912,7 +2912,7 @@
           <a:p>
             <a:fld id="{9FF286C0-AED3-4EB2-81B2-2C6EA95602B7}" type="datetimeFigureOut">
               <a:rPr lang="ko-KR" altLang="en-US" smtClean="0"/>
-              <a:t>2026-05-30</a:t>
+              <a:t>2026-06-04</a:t>
             </a:fld>
             <a:endParaRPr lang="ko-KR" altLang="en-US"/>
           </a:p>
@@ -11685,7 +11685,7 @@
                     <a:schemeClr val="tx1"/>
                   </a:solidFill>
                 </a:rPr>
-                <a:t>- Script …</a:t>
+                <a:t>- Script</a:t>
               </a:r>
               <a:endParaRPr lang="ko-KR" altLang="en-US" dirty="0">
                 <a:solidFill>
